--- a/verification/revamp-R6/artifacts/tablet-profitlens-onepager.pptx
+++ b/verification/revamp-R6/artifacts/tablet-profitlens-onepager.pptx
@@ -933,7 +933,7 @@
                 <a:ea typeface="Microsoft JhengHei" pitchFamily="34" charset="-122"/>
                 <a:cs typeface="Microsoft JhengHei" pitchFamily="34" charset="-120"/>
               </a:rPr>
-              <a:t>本期營運會議（2026-10-03）</a:t>
+              <a:t>ProfitLens 一頁摘要</a:t>
             </a:r>
             <a:endParaRPr lang="en-US" sz="1800" dirty="0"/>
           </a:p>
@@ -2360,7 +2360,7 @@
                 <a:ea typeface="Microsoft JhengHei" pitchFamily="34" charset="-122"/>
                 <a:cs typeface="Microsoft JhengHei" pitchFamily="34" charset="-120"/>
               </a:rPr>
-              <a:t>決議：草稿</a:t>
+              <a:t>目前檢視，不含會議決議；決議請到「會議紀錄」頁輸出。</a:t>
             </a:r>
             <a:endParaRPr lang="en-US" sz="1000" dirty="0"/>
           </a:p>
